--- a/cursos/recursos/desequilibrios-de-material/04-alfiles-de-distinto-color-iniciativa.pptx
+++ b/cursos/recursos/desequilibrios-de-material/04-alfiles-de-distinto-color-iniciativa.pptx
@@ -3482,7 +3482,7 @@
                 </a:solidFill>
                 <a:latin typeface="Calibri"/>
               </a:rPr>
-              <a:t>Pista: Fijate en qué color de casilla corona el peón h y qué color tiene cada alfil.</a:t>
+              <a:t>Pista: Fíjate en qué color de casilla corona el peón h y qué color tiene cada alfil.</a:t>
             </a:r>
           </a:p>
         </p:txBody>
@@ -4026,7 +4026,7 @@
                 </a:solidFill>
                 <a:latin typeface="Calibri"/>
               </a:rPr>
-              <a:t>•  Antes de evaluar un final de alfiles de distinto color por el material, fijate en qué diagonal controla cada alfil y si esa diagonal incluye la casilla de coronación rival.</a:t>
+              <a:t>•  Antes de evaluar un final de alfiles de distinto color por el material, fíjate en qué diagonal controla cada alfil y si esa diagonal incluye la casilla de coronación rival.</a:t>
             </a:r>
           </a:p>
           <a:p>
@@ -4058,7 +4058,7 @@
                 </a:solidFill>
                 <a:latin typeface="Calibri"/>
               </a:rPr>
-              <a:t>•  Cuando tengas que capturar para simplificar en estos finales, elegí siempre la captura que mantiene a tu alfil controlando la diagonal decisiva.</a:t>
+              <a:t>•  Cuando tengas que capturar para simplificar en estos finales, elige siempre la captura que mantiene a tu alfil controlando la diagonal decisiva.</a:t>
             </a:r>
           </a:p>
         </p:txBody>
@@ -5629,7 +5629,7 @@
                 </a:solidFill>
                 <a:latin typeface="Calibri"/>
               </a:rPr>
-              <a:t>Pista: Amenazá mate en la última fila; a las negras no les queda otra que cambiar damas.</a:t>
+              <a:t>Pista: Amenaza mate en la última fila; a las negras no les queda otra que cambiar damas.</a:t>
             </a:r>
           </a:p>
         </p:txBody>
@@ -6380,7 +6380,7 @@
                 </a:solidFill>
                 <a:latin typeface="Calibri"/>
               </a:rPr>
-              <a:t>•  Cuando las piezas rivales queden completamente atadas por una amenaza de mate latente, aprovechá el tiempo ganado para mejorar tu rey con calma antes de definir.</a:t>
+              <a:t>•  Cuando las piezas rivales queden completamente atadas por una amenaza de mate latente, aprovecha el tiempo ganado para mejorar tu rey con calma antes de definir.</a:t>
             </a:r>
           </a:p>
         </p:txBody>
@@ -6982,7 +6982,7 @@
                 </a:solidFill>
                 <a:latin typeface="Calibri"/>
               </a:rPr>
-              <a:t>Pista: Atacá la torre desde una casilla donde el alfil también mejora su diagonal.</a:t>
+              <a:t>Pista: Ataca la torre desde una casilla donde el alfil también mejora su diagonal.</a:t>
             </a:r>
           </a:p>
         </p:txBody>
@@ -7628,7 +7628,7 @@
                 </a:solidFill>
                 <a:latin typeface="Calibri"/>
               </a:rPr>
-              <a:t>Pista: Cubrí la casilla d3 antes de que el rey blanco pueda usarla para dar jaque.</a:t>
+              <a:t>Pista: Cubre la casilla d3 antes de que el rey blanco pueda usarla para dar jaque.</a:t>
             </a:r>
           </a:p>
         </p:txBody>
@@ -7951,7 +7951,7 @@
                 </a:solidFill>
                 <a:latin typeface="Calibri"/>
               </a:rPr>
-              <a:t>Pista: Colocá la torre en la columna donde el rey blanco está encerrado.</a:t>
+              <a:t>Pista: Coloca la torre en la columna donde el rey blanco está encerrado.</a:t>
             </a:r>
           </a:p>
         </p:txBody>
@@ -8274,7 +8274,7 @@
                 </a:solidFill>
                 <a:latin typeface="Calibri"/>
               </a:rPr>
-              <a:t>Pista: Ocupá la casilla que el alfil necesita para escapar, forzando una elección imposible.</a:t>
+              <a:t>Pista: Ocupa la casilla que el alfil necesita para escapar, forzando una elección imposible.</a:t>
             </a:r>
           </a:p>
         </p:txBody>
@@ -8670,7 +8670,7 @@
                 </a:solidFill>
                 <a:latin typeface="Calibri"/>
               </a:rPr>
-              <a:t>Armá la posición ilustrativa de 'diagonal única' de esta lección y jugala contra el motor tomando el bando con menos material, tratando de encontrar el camino exacto hacia las tablas teóricas. Después revisá la partida Tari–Carlsen buscando los dos o tres momentos donde el sacrificio de un peón sirvió únicamente para debilitar la estructura rival.</a:t>
+              <a:t>Arma la posición ilustrativa de 'diagonal única' de esta lección y juégala contra el motor tomando el bando con menos material, tratando de encontrar el camino exacto hacia las tablas teóricas. Después revisa la partida Tari–Carlsen buscando los dos o tres momentos donde el sacrificio de un peón sirvió únicamente para debilitar la estructura rival.</a:t>
             </a:r>
           </a:p>
           <a:p>
@@ -8702,7 +8702,7 @@
                 </a:solidFill>
                 <a:latin typeface="Calibri"/>
               </a:rPr>
-              <a:t>En la página del curso podés recorrer cada partida con los comentarios, adivinar las jugadas clave en el tablero y continuar cualquier posición contra el motor (Stockfish). La hoja de ejercicios en PDF reúne los momentos clave de esta lección para resolver sin tablero.</a:t>
+              <a:t>En la página del curso puedes recorrer cada partida con los comentarios, adivinar las jugadas clave en el tablero y continuar cualquier posición contra el motor (Stockfish). La hoja de ejercicios en PDF reúne los momentos clave de esta lección para resolver sin tablero.</a:t>
             </a:r>
           </a:p>
         </p:txBody>
@@ -8741,7 +8741,7 @@
                 </a:solidFill>
                 <a:latin typeface="Calibri"/>
               </a:rPr>
-              <a:t>•  Primero recorré la partida completa leyendo los comentarios.</a:t>
+              <a:t>•  Primero recorre la partida completa leyendo los comentarios.</a:t>
             </a:r>
           </a:p>
           <a:p>
@@ -8757,7 +8757,7 @@
                 </a:solidFill>
                 <a:latin typeface="Calibri"/>
               </a:rPr>
-              <a:t>•  Después hacé el modo "adivinar las jugadas clave" hasta acertar todas.</a:t>
+              <a:t>•  Después haz el modo "adivinar las jugadas clave" hasta acertar todas.</a:t>
             </a:r>
           </a:p>
           <a:p>
@@ -8773,7 +8773,7 @@
                 </a:solidFill>
                 <a:latin typeface="Calibri"/>
               </a:rPr>
-              <a:t>•  Por último respondé el cuestionario y anotá con tus palabras las reglas de la lección.</a:t>
+              <a:t>•  Por último responde el cuestionario y anota con tus palabras las reglas de la lección.</a:t>
             </a:r>
           </a:p>
         </p:txBody>
@@ -9504,7 +9504,7 @@
                 </a:solidFill>
                 <a:latin typeface="Calibri"/>
               </a:rPr>
-              <a:t>•  No confundas alfiles de distinto color con tablas automáticas: contá primero quién controla el complejo de color decisivo.</a:t>
+              <a:t>•  No confundas alfiles de distinto color con tablas automáticas: cuenta primero quién controla el complejo de color decisivo.</a:t>
             </a:r>
           </a:p>
           <a:p>
@@ -9520,7 +9520,7 @@
                 </a:solidFill>
                 <a:latin typeface="Calibri"/>
               </a:rPr>
-              <a:t>•  Fijá los peones débiles del rival en el color de tu propio alfil para que queden indefendibles.</a:t>
+              <a:t>•  Fija los peones débiles del rival en el color de tu propio alfil para que queden indefendibles.</a:t>
             </a:r>
           </a:p>
           <a:p>
@@ -9536,7 +9536,7 @@
                 </a:solidFill>
                 <a:latin typeface="Calibri"/>
               </a:rPr>
-              <a:t>•  Buscá activamente la invasión del rey o las piezas por las casillas que tu alfil controla y el rival no.</a:t>
+              <a:t>•  Busca activamente la invasión del rey o las piezas por las casillas que tu alfil controla y el rival no.</a:t>
             </a:r>
           </a:p>
           <a:p>
@@ -9552,7 +9552,7 @@
                 </a:solidFill>
                 <a:latin typeface="Calibri"/>
               </a:rPr>
-              <a:t>•  Si defendés, evitá que tus peones débiles queden en el color del alfil rival.</a:t>
+              <a:t>•  Si defiendes, evita que tus peones débiles queden en el color del alfil rival.</a:t>
             </a:r>
           </a:p>
           <a:p>
@@ -9750,7 +9750,7 @@
                 </a:solidFill>
                 <a:latin typeface="Calibri"/>
               </a:rPr>
-              <a:t>•  En finales de alfiles de distinto color, lo que importa no es cuántos peones tenés de más, sino si tu alfil controla la casilla de coronación de los peones rivales.</a:t>
+              <a:t>•  En finales de alfiles de distinto color, lo que importa no es cuántos peones tienes de más, sino si tu alfil controla la casilla de coronación de los peones rivales.</a:t>
             </a:r>
           </a:p>
           <a:p>
@@ -9782,7 +9782,7 @@
                 </a:solidFill>
                 <a:latin typeface="Calibri"/>
               </a:rPr>
-              <a:t>•  Antes de lanzarte a contar material en un final de alfiles de distinto color, fijate primero en el color de las casillas de coronación.</a:t>
+              <a:t>•  Antes de lanzarte a contar material en un final de alfiles de distinto color, fíjate primero en el color de las casillas de coronación.</a:t>
             </a:r>
           </a:p>
         </p:txBody>
